--- a/courseware/DSA_CH04_String.pptx
+++ b/courseware/DSA_CH04_String.pptx
@@ -3323,7 +3323,7 @@
                 <a:latin typeface="Segoe UI"/>
                 <a:ea typeface="微软雅黑"/>
               </a:rPr>
-              <a:t>现代化重制版讲义　代码按 C++17 重写，全部可编译、可运行</a:t>
+              <a:t>现代化重制版讲义　代码按 C++17 重写；code/ 全部单元双档编译运行通过</a:t>
             </a:r>
           </a:p>
         </p:txBody>
@@ -12891,7 +12891,7 @@
                 <a:latin typeface="Segoe UI"/>
                 <a:ea typeface="微软雅黑"/>
               </a:rPr>
-              <a:t>习题（完整题面与参考答案见同名讲义）</a:t>
+              <a:t>习题选讲</a:t>
             </a:r>
           </a:p>
         </p:txBody>
@@ -12970,11 +12970,11 @@
                 <a:spcPts val="0"/>
               </a:spcBef>
               <a:spcAft>
-                <a:spcPts val="1240"/>
-              </a:spcAft>
-            </a:pPr>
-            <a:r>
-              <a:rPr sz="2000" b="0" i="0">
+                <a:spcPts val="1178"/>
+              </a:spcAft>
+            </a:pPr>
+            <a:r>
+              <a:rPr sz="1900" b="0" i="0">
                 <a:solidFill>
                   <a:srgbClr val="242A33"/>
                 </a:solidFill>
@@ -12984,7 +12984,7 @@
               <a:t>•  </a:t>
             </a:r>
             <a:r>
-              <a:rPr sz="2000" b="1" i="0">
+              <a:rPr sz="1900" b="1" i="0">
                 <a:solidFill>
                   <a:srgbClr val="12395B"/>
                 </a:solidFill>
@@ -12994,7 +12994,7 @@
               <a:t>习题 2</a:t>
             </a:r>
             <a:r>
-              <a:rPr sz="2000" b="0" i="0">
+              <a:rPr sz="1900" b="0" i="0">
                 <a:solidFill>
                   <a:srgbClr val="242A33"/>
                 </a:solidFill>
@@ -13004,7 +13004,7 @@
               <a:t>　给出使 </a:t>
             </a:r>
             <a:r>
-              <a:rPr sz="1879" b="0" i="0">
+              <a:rPr sz="1786" b="0" i="0">
                 <a:solidFill>
                   <a:srgbClr val="242A33"/>
                 </a:solidFill>
@@ -13014,7 +13014,7 @@
               <a:t>s1 + s2 == s2 + s1</a:t>
             </a:r>
             <a:r>
-              <a:rPr sz="2000" b="0" i="0">
+              <a:rPr sz="1900" b="0" i="0">
                 <a:solidFill>
                   <a:srgbClr val="242A33"/>
                 </a:solidFill>
@@ -13024,7 +13024,7 @@
               <a:t> 成立的</a:t>
             </a:r>
             <a:r>
-              <a:rPr sz="2000" b="1" i="0">
+              <a:rPr sz="1900" b="1" i="0">
                 <a:solidFill>
                   <a:srgbClr val="12395B"/>
                 </a:solidFill>
@@ -13034,7 +13034,7 @@
               <a:t>所有</a:t>
             </a:r>
             <a:r>
-              <a:rPr sz="2000" b="0" i="0">
+              <a:rPr sz="1900" b="0" i="0">
                 <a:solidFill>
                   <a:srgbClr val="242A33"/>
                 </a:solidFill>
@@ -13053,11 +13053,11 @@
                 <a:spcPts val="0"/>
               </a:spcBef>
               <a:spcAft>
-                <a:spcPts val="1240"/>
-              </a:spcAft>
-            </a:pPr>
-            <a:r>
-              <a:rPr sz="2000" b="0" i="0">
+                <a:spcPts val="1178"/>
+              </a:spcAft>
+            </a:pPr>
+            <a:r>
+              <a:rPr sz="1900" b="0" i="0">
                 <a:solidFill>
                   <a:srgbClr val="242A33"/>
                 </a:solidFill>
@@ -13067,7 +13067,7 @@
               <a:t>•  </a:t>
             </a:r>
             <a:r>
-              <a:rPr sz="2000" b="1" i="0">
+              <a:rPr sz="1900" b="1" i="0">
                 <a:solidFill>
                   <a:srgbClr val="12395B"/>
                 </a:solidFill>
@@ -13077,7 +13077,7 @@
               <a:t>习题 4</a:t>
             </a:r>
             <a:r>
-              <a:rPr sz="2000" b="0" i="0">
+              <a:rPr sz="1900" b="0" i="0">
                 <a:solidFill>
                   <a:srgbClr val="242A33"/>
                 </a:solidFill>
@@ -13096,11 +13096,11 @@
                 <a:spcPts val="0"/>
               </a:spcBef>
               <a:spcAft>
-                <a:spcPts val="892"/>
-              </a:spcAft>
-            </a:pPr>
-            <a:r>
-              <a:rPr sz="1639" b="0" i="0">
+                <a:spcPts val="848"/>
+              </a:spcAft>
+            </a:pPr>
+            <a:r>
+              <a:rPr sz="1557" b="0" i="0">
                 <a:solidFill>
                   <a:srgbClr val="6B7582"/>
                 </a:solidFill>
@@ -13110,7 +13110,7 @@
               <a:t>·  例：</a:t>
             </a:r>
             <a:r>
-              <a:rPr sz="1541" b="0" i="0">
+              <a:rPr sz="1464" b="0" i="0">
                 <a:solidFill>
                   <a:srgbClr val="6B7582"/>
                 </a:solidFill>
@@ -13120,7 +13120,7 @@
               <a:t>ABCDEFGHIJKL</a:t>
             </a:r>
             <a:r>
-              <a:rPr sz="1639" b="0" i="0">
+              <a:rPr sz="1557" b="0" i="0">
                 <a:solidFill>
                   <a:srgbClr val="6B7582"/>
                 </a:solidFill>
@@ -13130,7 +13130,7 @@
               <a:t> → </a:t>
             </a:r>
             <a:r>
-              <a:rPr sz="1541" b="0" i="0">
+              <a:rPr sz="1464" b="0" i="0">
                 <a:solidFill>
                   <a:srgbClr val="6B7582"/>
                 </a:solidFill>
@@ -13149,11 +13149,11 @@
                 <a:spcPts val="0"/>
               </a:spcBef>
               <a:spcAft>
-                <a:spcPts val="1240"/>
-              </a:spcAft>
-            </a:pPr>
-            <a:r>
-              <a:rPr sz="2000" b="0" i="0">
+                <a:spcPts val="1178"/>
+              </a:spcAft>
+            </a:pPr>
+            <a:r>
+              <a:rPr sz="1900" b="0" i="0">
                 <a:solidFill>
                   <a:srgbClr val="242A33"/>
                 </a:solidFill>
@@ -13163,7 +13163,7 @@
               <a:t>•  </a:t>
             </a:r>
             <a:r>
-              <a:rPr sz="2000" b="1" i="0">
+              <a:rPr sz="1900" b="1" i="0">
                 <a:solidFill>
                   <a:srgbClr val="12395B"/>
                 </a:solidFill>
@@ -13173,7 +13173,7 @@
               <a:t>习题 7</a:t>
             </a:r>
             <a:r>
-              <a:rPr sz="2000" b="0" i="0">
+              <a:rPr sz="1900" b="0" i="0">
                 <a:solidFill>
                   <a:srgbClr val="242A33"/>
                 </a:solidFill>
@@ -13183,7 +13183,7 @@
               <a:t>　</a:t>
             </a:r>
             <a:r>
-              <a:rPr sz="2000" b="1" i="0">
+              <a:rPr sz="1900" b="1" i="0">
                 <a:solidFill>
                   <a:srgbClr val="12395B"/>
                 </a:solidFill>
@@ -13193,7 +13193,7 @@
               <a:t>线性时间</a:t>
             </a:r>
             <a:r>
-              <a:rPr sz="2000" b="0" i="0">
+              <a:rPr sz="1900" b="0" i="0">
                 <a:solidFill>
                   <a:srgbClr val="242A33"/>
                 </a:solidFill>
@@ -13203,7 +13203,7 @@
               <a:t>判断 T 是否是 T′ 的循环移位（如 </a:t>
             </a:r>
             <a:r>
-              <a:rPr sz="1879" b="0" i="0">
+              <a:rPr sz="1786" b="0" i="0">
                 <a:solidFill>
                   <a:srgbClr val="242A33"/>
                 </a:solidFill>
@@ -13213,7 +13213,7 @@
               <a:t>arc</a:t>
             </a:r>
             <a:r>
-              <a:rPr sz="2000" b="0" i="0">
+              <a:rPr sz="1900" b="0" i="0">
                 <a:solidFill>
                   <a:srgbClr val="242A33"/>
                 </a:solidFill>
@@ -13223,7 +13223,7 @@
               <a:t> 与 </a:t>
             </a:r>
             <a:r>
-              <a:rPr sz="1879" b="0" i="0">
+              <a:rPr sz="1786" b="0" i="0">
                 <a:solidFill>
                   <a:srgbClr val="242A33"/>
                 </a:solidFill>
@@ -13233,7 +13233,7 @@
               <a:t>car</a:t>
             </a:r>
             <a:r>
-              <a:rPr sz="2000" b="0" i="0">
+              <a:rPr sz="1900" b="0" i="0">
                 <a:solidFill>
                   <a:srgbClr val="242A33"/>
                 </a:solidFill>
@@ -13252,11 +13252,11 @@
                 <a:spcPts val="0"/>
               </a:spcBef>
               <a:spcAft>
-                <a:spcPts val="1240"/>
-              </a:spcAft>
-            </a:pPr>
-            <a:r>
-              <a:rPr sz="2000" b="0" i="0">
+                <a:spcPts val="1178"/>
+              </a:spcAft>
+            </a:pPr>
+            <a:r>
+              <a:rPr sz="1900" b="0" i="0">
                 <a:solidFill>
                   <a:srgbClr val="242A33"/>
                 </a:solidFill>
@@ -13266,7 +13266,7 @@
               <a:t>•  </a:t>
             </a:r>
             <a:r>
-              <a:rPr sz="2000" b="1" i="0">
+              <a:rPr sz="1900" b="1" i="0">
                 <a:solidFill>
                   <a:srgbClr val="12395B"/>
                 </a:solidFill>
@@ -13276,7 +13276,7 @@
               <a:t>习题 9</a:t>
             </a:r>
             <a:r>
-              <a:rPr sz="2000" b="0" i="0">
+              <a:rPr sz="1900" b="0" i="0">
                 <a:solidFill>
                   <a:srgbClr val="242A33"/>
                 </a:solidFill>
@@ -13286,7 +13286,7 @@
               <a:t>　求 </a:t>
             </a:r>
             <a:r>
-              <a:rPr sz="1879" b="0" i="0">
+              <a:rPr sz="1786" b="0" i="0">
                 <a:solidFill>
                   <a:srgbClr val="242A33"/>
                 </a:solidFill>
@@ -13296,7 +13296,7 @@
               <a:t>BAAABBBAA</a:t>
             </a:r>
             <a:r>
-              <a:rPr sz="2000" b="0" i="0">
+              <a:rPr sz="1900" b="0" i="0">
                 <a:solidFill>
                   <a:srgbClr val="242A33"/>
                 </a:solidFill>
@@ -13306,7 +13306,7 @@
               <a:t> 的特征向量，并与给定目标匹配，</a:t>
             </a:r>
             <a:r>
-              <a:rPr sz="2000" b="1" i="0">
+              <a:rPr sz="1900" b="1" i="0">
                 <a:solidFill>
                   <a:srgbClr val="12395B"/>
                 </a:solidFill>
@@ -13325,11 +13325,11 @@
                 <a:spcPts val="0"/>
               </a:spcBef>
               <a:spcAft>
-                <a:spcPts val="1240"/>
-              </a:spcAft>
-            </a:pPr>
-            <a:r>
-              <a:rPr sz="2000" b="0" i="0">
+                <a:spcPts val="1178"/>
+              </a:spcAft>
+            </a:pPr>
+            <a:r>
+              <a:rPr sz="1900" b="0" i="0">
                 <a:solidFill>
                   <a:srgbClr val="242A33"/>
                 </a:solidFill>
@@ -13339,7 +13339,7 @@
               <a:t>•  </a:t>
             </a:r>
             <a:r>
-              <a:rPr sz="2000" b="1" i="0">
+              <a:rPr sz="1900" b="1" i="0">
                 <a:solidFill>
                   <a:srgbClr val="12395B"/>
                 </a:solidFill>
@@ -13349,7 +13349,7 @@
               <a:t>上机 3</a:t>
             </a:r>
             <a:r>
-              <a:rPr sz="2000" b="0" i="0">
+              <a:rPr sz="1900" b="0" i="0">
                 <a:solidFill>
                   <a:srgbClr val="242A33"/>
                 </a:solidFill>
@@ -13359,7 +13359,7 @@
               <a:t>　求最长重复子串及其下标（</a:t>
             </a:r>
             <a:r>
-              <a:rPr sz="1879" b="0" i="0">
+              <a:rPr sz="1786" b="0" i="0">
                 <a:solidFill>
                   <a:srgbClr val="242A33"/>
                 </a:solidFill>
@@ -13369,7 +13369,7 @@
               <a:t>abcdacdac</a:t>
             </a:r>
             <a:r>
-              <a:rPr sz="2000" b="0" i="0">
+              <a:rPr sz="1900" b="0" i="0">
                 <a:solidFill>
                   <a:srgbClr val="242A33"/>
                 </a:solidFill>
@@ -13379,7 +13379,7 @@
               <a:t> → </a:t>
             </a:r>
             <a:r>
-              <a:rPr sz="1879" b="0" i="0">
+              <a:rPr sz="1786" b="0" i="0">
                 <a:solidFill>
                   <a:srgbClr val="242A33"/>
                 </a:solidFill>
@@ -13389,7 +13389,7 @@
               <a:t>cdac</a:t>
             </a:r>
             <a:r>
-              <a:rPr sz="2000" b="0" i="0">
+              <a:rPr sz="1900" b="0" i="0">
                 <a:solidFill>
                   <a:srgbClr val="242A33"/>
                 </a:solidFill>
@@ -13408,11 +13408,11 @@
                 <a:spcPts val="0"/>
               </a:spcBef>
               <a:spcAft>
-                <a:spcPts val="1240"/>
-              </a:spcAft>
-            </a:pPr>
-            <a:r>
-              <a:rPr sz="2000" b="0" i="0">
+                <a:spcPts val="1178"/>
+              </a:spcAft>
+            </a:pPr>
+            <a:r>
+              <a:rPr sz="1900" b="0" i="0">
                 <a:solidFill>
                   <a:srgbClr val="242A33"/>
                 </a:solidFill>
@@ -13422,7 +13422,7 @@
               <a:t>•  </a:t>
             </a:r>
             <a:r>
-              <a:rPr sz="2000" b="1" i="0">
+              <a:rPr sz="1900" b="1" i="0">
                 <a:solidFill>
                   <a:srgbClr val="12395B"/>
                 </a:solidFill>
@@ -13432,7 +13432,7 @@
               <a:t>上机 4</a:t>
             </a:r>
             <a:r>
-              <a:rPr sz="2000" b="0" i="0">
+              <a:rPr sz="1900" b="0" i="0">
                 <a:solidFill>
                   <a:srgbClr val="242A33"/>
                 </a:solidFill>
@@ -13442,7 +13442,7 @@
               <a:t>　行编辑程序：查找必须</a:t>
             </a:r>
             <a:r>
-              <a:rPr sz="2000" b="1" i="0">
+              <a:rPr sz="1900" b="1" i="0">
                 <a:solidFill>
                   <a:srgbClr val="12395B"/>
                 </a:solidFill>
@@ -13452,7 +13452,7 @@
               <a:t>自己实现</a:t>
             </a:r>
             <a:r>
-              <a:rPr sz="2000" b="0" i="0">
+              <a:rPr sz="1900" b="0" i="0">
                 <a:solidFill>
                   <a:srgbClr val="242A33"/>
                 </a:solidFill>
@@ -13460,6 +13460,79 @@
                 <a:ea typeface="微软雅黑"/>
               </a:rPr>
               <a:t> KMP，不许用环境提供的查找</a:t>
+            </a:r>
+          </a:p>
+          <a:p>
+            <a:pPr algn="l">
+              <a:lnSpc>
+                <a:spcPct val="132000"/>
+              </a:lnSpc>
+              <a:spcBef>
+                <a:spcPts val="0"/>
+              </a:spcBef>
+              <a:spcAft>
+                <a:spcPts val="1178"/>
+              </a:spcAft>
+            </a:pPr>
+            <a:r>
+              <a:rPr sz="1900" b="0" i="0">
+                <a:solidFill>
+                  <a:srgbClr val="242A33"/>
+                </a:solidFill>
+                <a:latin typeface="Segoe UI"/>
+                <a:ea typeface="微软雅黑"/>
+              </a:rPr>
+              <a:t>•  </a:t>
+            </a:r>
+            <a:r>
+              <a:rPr sz="1900" b="1" i="0">
+                <a:solidFill>
+                  <a:srgbClr val="12395B"/>
+                </a:solidFill>
+                <a:latin typeface="Segoe UI"/>
+                <a:ea typeface="微软雅黑"/>
+              </a:rPr>
+              <a:t>这一页和讲义里都是选讲。</a:t>
+            </a:r>
+            <a:r>
+              <a:rPr sz="1900" b="0" i="0">
+                <a:solidFill>
+                  <a:srgbClr val="242A33"/>
+                </a:solidFill>
+                <a:latin typeface="Segoe UI"/>
+                <a:ea typeface="微软雅黑"/>
+              </a:rPr>
+              <a:t> 原书全部 </a:t>
+            </a:r>
+            <a:r>
+              <a:rPr sz="1900" b="1" i="0">
+                <a:solidFill>
+                  <a:srgbClr val="12395B"/>
+                </a:solidFill>
+                <a:latin typeface="Segoe UI"/>
+                <a:ea typeface="微软雅黑"/>
+              </a:rPr>
+              <a:t>345 道</a:t>
+            </a:r>
+            <a:r>
+              <a:rPr sz="1900" b="0" i="0">
+                <a:solidFill>
+                  <a:srgbClr val="242A33"/>
+                </a:solidFill>
+                <a:latin typeface="Segoe UI"/>
+                <a:ea typeface="微软雅黑"/>
+              </a:rPr>
+              <a:t>习题与上机题的参考答案，在 </a:t>
+            </a:r>
+            <a:r>
+              <a:rPr sz="1786" b="0" i="0">
+                <a:solidFill>
+                  <a:srgbClr val="242A33"/>
+                </a:solidFill>
+                <a:latin typeface="Consolas"/>
+                <a:ea typeface="Consolas"/>
+              </a:rPr>
+              <a:t>book/习题与参考答案.md</a:t>
             </a:r>
           </a:p>
         </p:txBody>
